--- a/dist/weeks-대학원/컨셉트와프로세스_01주차_컨셉트의층위.pptx
+++ b/dist/weeks-대학원/컨셉트와프로세스_01주차_컨셉트의층위.pptx
@@ -11505,7 +11505,7 @@
                 <a:ea typeface="Pretendard Black" pitchFamily="34" charset="-122"/>
                 <a:cs typeface="Pretendard Black" pitchFamily="34" charset="-120"/>
               </a:rPr>
-              <a:t>디자인 프로세스의 계보</a:t>
+              <a:t>디자인 프로세스의 계보  (9/23 · 격주 120분)</a:t>
             </a:r>
             <a:endParaRPr lang="en-US" sz="1700" dirty="0"/>
           </a:p>
